--- a/Python/Lesson 01 - Python Basics/Lesson 1  - Intro to Python.pptx
+++ b/Python/Lesson 01 - Python Basics/Lesson 1  - Intro to Python.pptx
@@ -4344,7 +4344,7 @@
           <a:p>
             <a:fld id="{7A3E0868-4E26-4CDC-8A56-D70E2D8B12FE}" type="datetime3">
               <a:rPr lang="en-US" smtClean="0"/>
-              <a:t>3 June 2026</a:t>
+              <a:t>9 July 2026</a:t>
             </a:fld>
             <a:endParaRPr lang="en-US"/>
           </a:p>
@@ -6905,7 +6905,7 @@
           <a:p>
             <a:fld id="{A7B8021B-6105-4216-96FC-94348F216D0E}" type="datetime3">
               <a:rPr lang="en-US" smtClean="0"/>
-              <a:t>3 June 2026</a:t>
+              <a:t>9 July 2026</a:t>
             </a:fld>
             <a:endParaRPr lang="en-US"/>
           </a:p>
@@ -8602,7 +8602,7 @@
           <a:p>
             <a:fld id="{5D27CFAB-73E6-44A8-B862-B3306344E3F2}" type="datetime3">
               <a:rPr lang="en-US" smtClean="0"/>
-              <a:t>3 June 2026</a:t>
+              <a:t>9 July 2026</a:t>
             </a:fld>
             <a:endParaRPr lang="en-US"/>
           </a:p>
@@ -10392,7 +10392,7 @@
           <a:p>
             <a:fld id="{A9B2E784-A5F5-4301-881B-94AC8DBF9DED}" type="datetime3">
               <a:rPr lang="en-US" smtClean="0"/>
-              <a:t>3 June 2026</a:t>
+              <a:t>9 July 2026</a:t>
             </a:fld>
             <a:endParaRPr lang="en-US"/>
           </a:p>
@@ -10571,7 +10571,7 @@
           <a:p>
             <a:fld id="{18EAB3A5-9E92-4BB9-8F22-9632B4FBEDBA}" type="datetime3">
               <a:rPr lang="en-US" smtClean="0"/>
-              <a:t>3 June 2026</a:t>
+              <a:t>9 July 2026</a:t>
             </a:fld>
             <a:endParaRPr lang="en-US"/>
           </a:p>
@@ -10798,7 +10798,7 @@
           <a:p>
             <a:fld id="{40923810-5FB2-48C9-96CA-1DE2C4773142}" type="datetime3">
               <a:rPr lang="en-US" smtClean="0"/>
-              <a:t>3 June 2026</a:t>
+              <a:t>9 July 2026</a:t>
             </a:fld>
             <a:endParaRPr lang="en-US"/>
           </a:p>
@@ -11088,7 +11088,7 @@
           <a:p>
             <a:fld id="{E50EFF4B-86EB-42FB-93EA-7D8F9CB2466F}" type="datetime3">
               <a:rPr lang="en-US" smtClean="0"/>
-              <a:t>3 June 2026</a:t>
+              <a:t>9 July 2026</a:t>
             </a:fld>
             <a:endParaRPr lang="en-US"/>
           </a:p>
@@ -11700,7 +11700,7 @@
           <a:p>
             <a:fld id="{FB14FC24-E041-45E9-9A72-E5755A86890F}" type="datetime3">
               <a:rPr lang="en-US" smtClean="0"/>
-              <a:t>3 June 2026</a:t>
+              <a:t>9 July 2026</a:t>
             </a:fld>
             <a:endParaRPr lang="en-US"/>
           </a:p>
@@ -12560,7 +12560,7 @@
           <a:p>
             <a:fld id="{98A19125-94A7-4474-858C-FD9C4ABE9DDA}" type="datetime3">
               <a:rPr lang="en-US" smtClean="0"/>
-              <a:t>3 June 2026</a:t>
+              <a:t>9 July 2026</a:t>
             </a:fld>
             <a:endParaRPr lang="en-US"/>
           </a:p>
@@ -13663,7 +13663,7 @@
           <a:p>
             <a:fld id="{3BA0343D-C8D8-43CE-BB79-50DEA219DB07}" type="datetime3">
               <a:rPr lang="en-US" smtClean="0"/>
-              <a:t>3 June 2026</a:t>
+              <a:t>9 July 2026</a:t>
             </a:fld>
             <a:endParaRPr lang="en-US"/>
           </a:p>
@@ -13952,7 +13952,7 @@
           <a:p>
             <a:fld id="{453BD212-0B9F-4987-965F-AC83B2FC354F}" type="datetime3">
               <a:rPr lang="en-US" smtClean="0"/>
-              <a:t>3 June 2026</a:t>
+              <a:t>9 July 2026</a:t>
             </a:fld>
             <a:endParaRPr lang="en-US"/>
           </a:p>
@@ -14197,7 +14197,7 @@
           <a:p>
             <a:fld id="{6DDC931E-8CBE-4A3F-A034-9B6122C6DCDB}" type="datetime3">
               <a:rPr lang="en-US" smtClean="0"/>
-              <a:t>3 June 2026</a:t>
+              <a:t>9 July 2026</a:t>
             </a:fld>
             <a:endParaRPr lang="en-US"/>
           </a:p>
@@ -15963,7 +15963,7 @@
           <a:p>
             <a:fld id="{220AF9C2-5E8A-4308-AE6B-CA9B65007D0E}" type="datetime3">
               <a:rPr lang="en-US" smtClean="0"/>
-              <a:t>3 June 2026</a:t>
+              <a:t>9 July 2026</a:t>
             </a:fld>
             <a:endParaRPr lang="en-US"/>
           </a:p>
@@ -16276,7 +16276,7 @@
           <a:p>
             <a:fld id="{FF31E861-D2AF-431D-860B-DCF67C218052}" type="datetime3">
               <a:rPr lang="en-US" smtClean="0"/>
-              <a:t>3 June 2026</a:t>
+              <a:t>9 July 2026</a:t>
             </a:fld>
             <a:endParaRPr lang="en-US"/>
           </a:p>
@@ -16555,7 +16555,7 @@
           <a:p>
             <a:fld id="{D1DA25B2-AAF1-4C1F-AA38-12D5BFA7D4C8}" type="datetime3">
               <a:rPr lang="en-US" smtClean="0"/>
-              <a:t>3 June 2026</a:t>
+              <a:t>9 July 2026</a:t>
             </a:fld>
             <a:endParaRPr lang="en-US"/>
           </a:p>
@@ -16834,7 +16834,7 @@
           <a:p>
             <a:fld id="{A25C0F39-45D0-48E9-90B3-7FE8FCE561C8}" type="datetime3">
               <a:rPr lang="en-US" smtClean="0"/>
-              <a:t>3 June 2026</a:t>
+              <a:t>9 July 2026</a:t>
             </a:fld>
             <a:endParaRPr lang="en-US"/>
           </a:p>
@@ -17335,7 +17335,7 @@
           <a:p>
             <a:fld id="{9BAF1A3D-92FA-4F24-9781-74AFA516A230}" type="datetime3">
               <a:rPr lang="en-US" smtClean="0"/>
-              <a:t>3 June 2026</a:t>
+              <a:t>9 July 2026</a:t>
             </a:fld>
             <a:endParaRPr lang="en-US"/>
           </a:p>
@@ -17462,7 +17462,7 @@
           <a:p>
             <a:fld id="{5719C672-856D-4617-A693-8FE15749A9B7}" type="datetime3">
               <a:rPr lang="en-US" smtClean="0"/>
-              <a:t>3 June 2026</a:t>
+              <a:t>9 July 2026</a:t>
             </a:fld>
             <a:endParaRPr lang="en-US"/>
           </a:p>
@@ -17597,7 +17597,7 @@
           <a:p>
             <a:fld id="{5F6C764D-A39E-4C03-B161-E0BC66E8883B}" type="datetime3">
               <a:rPr lang="en-US" smtClean="0"/>
-              <a:t>3 June 2026</a:t>
+              <a:t>9 July 2026</a:t>
             </a:fld>
             <a:endParaRPr lang="en-US"/>
           </a:p>
@@ -17839,7 +17839,7 @@
           <a:p>
             <a:fld id="{6E3E33F9-20B7-4995-BE7D-165DBB597850}" type="datetime3">
               <a:rPr lang="en-US" smtClean="0"/>
-              <a:t>3 June 2026</a:t>
+              <a:t>9 July 2026</a:t>
             </a:fld>
             <a:endParaRPr lang="en-US"/>
           </a:p>
@@ -17952,7 +17952,7 @@
           <a:p>
             <a:fld id="{CD41C263-3501-4369-A962-62B6BF915CDE}" type="datetime3">
               <a:rPr lang="en-US" smtClean="0"/>
-              <a:t>3 June 2026</a:t>
+              <a:t>9 July 2026</a:t>
             </a:fld>
             <a:endParaRPr lang="en-US"/>
           </a:p>
@@ -18355,7 +18355,7 @@
           <a:p>
             <a:fld id="{B06F3EBE-B2E8-4992-9F00-9E4B44F057C0}" type="datetime3">
               <a:rPr lang="en-US" smtClean="0"/>
-              <a:t>3 June 2026</a:t>
+              <a:t>9 July 2026</a:t>
             </a:fld>
             <a:endParaRPr lang="en-US"/>
           </a:p>
@@ -18487,7 +18487,7 @@
           <a:p>
             <a:fld id="{D41656AB-D2E1-472E-8B95-0DF5C6E1D623}" type="datetime3">
               <a:rPr lang="en-US" smtClean="0"/>
-              <a:t>3 June 2026</a:t>
+              <a:t>9 July 2026</a:t>
             </a:fld>
             <a:endParaRPr lang="en-US"/>
           </a:p>
@@ -22628,7 +22628,7 @@
           <a:p>
             <a:fld id="{AD622D1A-DF83-41A8-85FF-04D90BF831D3}" type="datetime3">
               <a:rPr lang="en-US" smtClean="0"/>
-              <a:t>3 June 2026</a:t>
+              <a:t>9 July 2026</a:t>
             </a:fld>
             <a:endParaRPr lang="en-US"/>
           </a:p>
@@ -22878,7 +22878,7 @@
           <a:p>
             <a:fld id="{334F72C3-CDF3-44A8-B602-1649B1728485}" type="datetime3">
               <a:rPr lang="en-US" smtClean="0"/>
-              <a:t>3 June 2026</a:t>
+              <a:t>9 July 2026</a:t>
             </a:fld>
             <a:endParaRPr lang="en-US"/>
           </a:p>
@@ -23185,7 +23185,7 @@
           <a:p>
             <a:fld id="{1E0132BA-B5E7-4FFD-AF6C-169169D47D4A}" type="datetime3">
               <a:rPr lang="en-US" smtClean="0"/>
-              <a:t>3 June 2026</a:t>
+              <a:t>9 July 2026</a:t>
             </a:fld>
             <a:endParaRPr lang="en-US"/>
           </a:p>
@@ -23666,7 +23666,7 @@
           <a:p>
             <a:fld id="{81A30091-1C2A-4151-8D3C-D1E47A72615F}" type="datetime3">
               <a:rPr lang="en-US" smtClean="0"/>
-              <a:t>3 June 2026</a:t>
+              <a:t>9 July 2026</a:t>
             </a:fld>
             <a:endParaRPr lang="en-US"/>
           </a:p>
@@ -24303,7 +24303,7 @@
           <a:p>
             <a:fld id="{35D703CE-07B4-4C05-A488-B4566700621F}" type="datetime3">
               <a:rPr lang="en-US" smtClean="0"/>
-              <a:t>3 June 2026</a:t>
+              <a:t>9 July 2026</a:t>
             </a:fld>
             <a:endParaRPr lang="en-US"/>
           </a:p>
@@ -25361,7 +25361,7 @@
           <a:p>
             <a:fld id="{694BD61C-20BA-43AF-A21F-1DAFB3200099}" type="datetime3">
               <a:rPr lang="en-US" smtClean="0"/>
-              <a:t>3 June 2026</a:t>
+              <a:t>9 July 2026</a:t>
             </a:fld>
             <a:endParaRPr lang="en-US"/>
           </a:p>
@@ -25848,7 +25848,7 @@
           <a:p>
             <a:fld id="{CABCB1B0-B6E5-4DD1-BB55-95C076D6C0C8}" type="datetime3">
               <a:rPr lang="en-US" smtClean="0"/>
-              <a:t>3 June 2026</a:t>
+              <a:t>9 July 2026</a:t>
             </a:fld>
             <a:endParaRPr lang="en-US"/>
           </a:p>
@@ -33458,7 +33458,7 @@
           <a:p>
             <a:pPr lvl="0"/>
             <a:r>
-              <a:rPr lang="en-US"/>
+              <a:rPr lang="en-US" dirty="0"/>
               <a:t>In Class Exercise 1</a:t>
             </a:r>
           </a:p>
@@ -33823,7 +33823,7 @@
           <a:p>
             <a:fld id="{334F72C3-CDF3-44A8-B602-1649B1728485}" type="datetime3">
               <a:rPr lang="en-US" smtClean="0"/>
-              <a:t>3 June 2026</a:t>
+              <a:t>9 July 2026</a:t>
             </a:fld>
             <a:endParaRPr lang="en-US"/>
           </a:p>
@@ -34005,7 +34005,7 @@
           <a:p>
             <a:fld id="{AD622D1A-DF83-41A8-85FF-04D90BF831D3}" type="datetime3">
               <a:rPr lang="en-US" smtClean="0"/>
-              <a:t>3 June 2026</a:t>
+              <a:t>9 July 2026</a:t>
             </a:fld>
             <a:endParaRPr lang="en-US"/>
           </a:p>
@@ -35340,7 +35340,7 @@
           <a:p>
             <a:fld id="{AD622D1A-DF83-41A8-85FF-04D90BF831D3}" type="datetime3">
               <a:rPr lang="en-US" smtClean="0"/>
-              <a:t>3 June 2026</a:t>
+              <a:t>9 July 2026</a:t>
             </a:fld>
             <a:endParaRPr lang="en-US"/>
           </a:p>
@@ -37914,7 +37914,7 @@
             <a:pPr lvl="0"/>
             <a:r>
               <a:rPr lang="en-US" dirty="0"/>
-              <a:t>A Pittsburgh pizza shop is having a two-for-one deal. You can get two small (12”) pizzas for $9.99. In contrast, a large pizza (16”) costs $9.99.  Which one is the better deal (yields more area)?</a:t>
+              <a:t>A Pittsburgh pizza shop is having a two-for-one deal. You can get two small (12”) pizzas for $9.99. In contrast, a large pizza (17”) costs $9.99.  Which one is the better deal (yields more area)?</a:t>
             </a:r>
           </a:p>
           <a:p>
@@ -39198,7 +39198,7 @@
           <a:p>
             <a:fld id="{334F72C3-CDF3-44A8-B602-1649B1728485}" type="datetime3">
               <a:rPr lang="en-US" smtClean="0"/>
-              <a:t>3 June 2026</a:t>
+              <a:t>9 July 2026</a:t>
             </a:fld>
             <a:endParaRPr lang="en-US"/>
           </a:p>
@@ -39523,7 +39523,7 @@
           <a:p>
             <a:fld id="{334F72C3-CDF3-44A8-B602-1649B1728485}" type="datetime3">
               <a:rPr lang="en-US" smtClean="0"/>
-              <a:t>3 June 2026</a:t>
+              <a:t>9 July 2026</a:t>
             </a:fld>
             <a:endParaRPr lang="en-US"/>
           </a:p>
@@ -39748,7 +39748,7 @@
           <a:p>
             <a:fld id="{334F72C3-CDF3-44A8-B602-1649B1728485}" type="datetime3">
               <a:rPr lang="en-US" smtClean="0"/>
-              <a:t>3 June 2026</a:t>
+              <a:t>9 July 2026</a:t>
             </a:fld>
             <a:endParaRPr lang="en-US"/>
           </a:p>
@@ -40840,7 +40840,7 @@
           <a:p>
             <a:fld id="{334F72C3-CDF3-44A8-B602-1649B1728485}" type="datetime3">
               <a:rPr lang="en-US" smtClean="0"/>
-              <a:t>3 June 2026</a:t>
+              <a:t>9 July 2026</a:t>
             </a:fld>
             <a:endParaRPr lang="en-US"/>
           </a:p>
@@ -41341,7 +41341,7 @@
           <a:p>
             <a:fld id="{334F72C3-CDF3-44A8-B602-1649B1728485}" type="datetime3">
               <a:rPr lang="en-US" smtClean="0"/>
-              <a:t>3 June 2026</a:t>
+              <a:t>9 July 2026</a:t>
             </a:fld>
             <a:endParaRPr lang="en-US"/>
           </a:p>
@@ -41804,7 +41804,7 @@
           <a:p>
             <a:fld id="{334F72C3-CDF3-44A8-B602-1649B1728485}" type="datetime3">
               <a:rPr lang="en-US" smtClean="0"/>
-              <a:t>3 June 2026</a:t>
+              <a:t>9 July 2026</a:t>
             </a:fld>
             <a:endParaRPr lang="en-US"/>
           </a:p>
@@ -42133,7 +42133,7 @@
           <a:p>
             <a:fld id="{334F72C3-CDF3-44A8-B602-1649B1728485}" type="datetime3">
               <a:rPr lang="en-US" smtClean="0"/>
-              <a:t>3 June 2026</a:t>
+              <a:t>9 July 2026</a:t>
             </a:fld>
             <a:endParaRPr lang="en-US"/>
           </a:p>
@@ -43408,7 +43408,7 @@
           <a:p>
             <a:fld id="{AD622D1A-DF83-41A8-85FF-04D90BF831D3}" type="datetime3">
               <a:rPr lang="en-US" smtClean="0"/>
-              <a:t>3 June 2026</a:t>
+              <a:t>9 July 2026</a:t>
             </a:fld>
             <a:endParaRPr lang="en-US"/>
           </a:p>
@@ -44159,7 +44159,7 @@
           <a:p>
             <a:fld id="{AD622D1A-DF83-41A8-85FF-04D90BF831D3}" type="datetime3">
               <a:rPr lang="en-US" smtClean="0"/>
-              <a:t>3 June 2026</a:t>
+              <a:t>9 July 2026</a:t>
             </a:fld>
             <a:endParaRPr lang="en-US"/>
           </a:p>
@@ -45179,7 +45179,7 @@
           <a:p>
             <a:fld id="{334F72C3-CDF3-44A8-B602-1649B1728485}" type="datetime3">
               <a:rPr lang="en-US" smtClean="0"/>
-              <a:t>3 June 2026</a:t>
+              <a:t>9 July 2026</a:t>
             </a:fld>
             <a:endParaRPr lang="en-US"/>
           </a:p>
